--- a/assets/pptx/catalog-470.pptx
+++ b/assets/pptx/catalog-470.pptx
@@ -3368,7 +3368,7 @@
                 <a:ea typeface="Ebrima"/>
                 <a:cs typeface="Ebrima"/>
               </a:rPr>
-              <a:t>- ሰይጣን ውሸቱን ነው (2x) ትሞታለህ ያለው (2x)</a:t>
+              <a:t>- ሰይጣን ውሸቱን ነው 2x ትሞታለህ ያለው 2x</a:t>
             </a:r>
           </a:p>
           <a:p>
@@ -3386,7 +3386,7 @@
                 <a:ea typeface="Ebrima"/>
                 <a:cs typeface="Ebrima"/>
               </a:rPr>
-              <a:t>ኢየሱስ እውነቱን ነው (3x) አትሞትም ያለው (2x)</a:t>
+              <a:t>ኢየሱስ እውነቱን ነው 3x አትሞትም ያለው 2x</a:t>
             </a:r>
           </a:p>
         </p:txBody>
@@ -3610,7 +3610,7 @@
                 <a:ea typeface="Ebrima"/>
                 <a:cs typeface="Ebrima"/>
               </a:rPr>
-              <a:t>ሌላ ሌላ ምሥጋና (4x)</a:t>
+              <a:t>ሌላ ሌላ ምሥጋና 4x</a:t>
             </a:r>
           </a:p>
         </p:txBody>
@@ -3798,7 +3798,7 @@
                 <a:ea typeface="Ebrima"/>
                 <a:cs typeface="Ebrima"/>
               </a:rPr>
-              <a:t>- ሰይጣን ውሸቱን ነው (2x) ትሞታለህ ያለው (2x)</a:t>
+              <a:t>- ሰይጣን ውሸቱን ነው 2x ትሞታለህ ያለው 2x</a:t>
             </a:r>
           </a:p>
           <a:p>
@@ -3816,7 +3816,7 @@
                 <a:ea typeface="Ebrima"/>
                 <a:cs typeface="Ebrima"/>
               </a:rPr>
-              <a:t>ኢየሱስ እውነቱን ነው (3x) አትሞትም ያለው (2x)</a:t>
+              <a:t>ኢየሱስ እውነቱን ነው 3x አትሞትም ያለው 2x</a:t>
             </a:r>
           </a:p>
         </p:txBody>
@@ -3919,7 +3919,7 @@
                 <a:ea typeface="Ebrima"/>
                 <a:cs typeface="Ebrima"/>
               </a:rPr>
-              <a:t>ሌላ ሌላ ምሥጋና (4x) (2x)</a:t>
+              <a:t>ሌላ ሌላ ምሥጋና 4x 2x</a:t>
             </a:r>
           </a:p>
         </p:txBody>
